--- a/slides/unsupervised.pptx
+++ b/slides/unsupervised.pptx
@@ -3999,7 +3999,7 @@
           <a:p>
             <a:fld id="{740993C0-9AB3-4209-9AF9-896CEF8BC588}" type="datetimeFigureOut">
               <a:rPr lang="en-US" smtClean="0"/>
-              <a:t>2/5/2025</a:t>
+              <a:t>10/14/2026</a:t>
             </a:fld>
             <a:endParaRPr lang="en-US"/>
           </a:p>
@@ -4169,7 +4169,7 @@
           <a:p>
             <a:fld id="{740993C0-9AB3-4209-9AF9-896CEF8BC588}" type="datetimeFigureOut">
               <a:rPr lang="en-US" smtClean="0"/>
-              <a:t>2/5/2025</a:t>
+              <a:t>10/14/2026</a:t>
             </a:fld>
             <a:endParaRPr lang="en-US"/>
           </a:p>
@@ -4415,7 +4415,7 @@
           <a:p>
             <a:fld id="{740993C0-9AB3-4209-9AF9-896CEF8BC588}" type="datetimeFigureOut">
               <a:rPr lang="en-US" smtClean="0"/>
-              <a:t>2/5/2025</a:t>
+              <a:t>10/14/2026</a:t>
             </a:fld>
             <a:endParaRPr lang="en-US"/>
           </a:p>
@@ -4647,7 +4647,7 @@
           <a:p>
             <a:fld id="{740993C0-9AB3-4209-9AF9-896CEF8BC588}" type="datetimeFigureOut">
               <a:rPr lang="en-US" smtClean="0"/>
-              <a:t>2/5/2025</a:t>
+              <a:t>10/14/2026</a:t>
             </a:fld>
             <a:endParaRPr lang="en-US"/>
           </a:p>
@@ -5014,7 +5014,7 @@
           <a:p>
             <a:fld id="{740993C0-9AB3-4209-9AF9-896CEF8BC588}" type="datetimeFigureOut">
               <a:rPr lang="en-US" smtClean="0"/>
-              <a:t>2/5/2025</a:t>
+              <a:t>10/14/2026</a:t>
             </a:fld>
             <a:endParaRPr lang="en-US"/>
           </a:p>
@@ -5132,7 +5132,7 @@
           <a:p>
             <a:fld id="{740993C0-9AB3-4209-9AF9-896CEF8BC588}" type="datetimeFigureOut">
               <a:rPr lang="en-US" smtClean="0"/>
-              <a:t>2/5/2025</a:t>
+              <a:t>10/14/2026</a:t>
             </a:fld>
             <a:endParaRPr lang="en-US"/>
           </a:p>
@@ -5227,7 +5227,7 @@
           <a:p>
             <a:fld id="{740993C0-9AB3-4209-9AF9-896CEF8BC588}" type="datetimeFigureOut">
               <a:rPr lang="en-US" smtClean="0"/>
-              <a:t>2/5/2025</a:t>
+              <a:t>10/14/2026</a:t>
             </a:fld>
             <a:endParaRPr lang="en-US"/>
           </a:p>
@@ -5780,7 +5780,7 @@
           <a:p>
             <a:fld id="{740993C0-9AB3-4209-9AF9-896CEF8BC588}" type="datetimeFigureOut">
               <a:rPr lang="en-US" smtClean="0"/>
-              <a:t>2/5/2025</a:t>
+              <a:t>10/14/2026</a:t>
             </a:fld>
             <a:endParaRPr lang="en-US"/>
           </a:p>
@@ -6037,7 +6037,7 @@
           <a:p>
             <a:fld id="{740993C0-9AB3-4209-9AF9-896CEF8BC588}" type="datetimeFigureOut">
               <a:rPr lang="en-US" smtClean="0"/>
-              <a:t>2/5/2025</a:t>
+              <a:t>10/14/2026</a:t>
             </a:fld>
             <a:endParaRPr lang="en-US"/>
           </a:p>
@@ -6207,7 +6207,7 @@
           <a:p>
             <a:fld id="{740993C0-9AB3-4209-9AF9-896CEF8BC588}" type="datetimeFigureOut">
               <a:rPr lang="en-US" smtClean="0"/>
-              <a:t>2/5/2025</a:t>
+              <a:t>10/14/2026</a:t>
             </a:fld>
             <a:endParaRPr lang="en-US"/>
           </a:p>
@@ -6387,7 +6387,7 @@
           <a:p>
             <a:fld id="{740993C0-9AB3-4209-9AF9-896CEF8BC588}" type="datetimeFigureOut">
               <a:rPr lang="en-US" smtClean="0"/>
-              <a:t>2/5/2025</a:t>
+              <a:t>10/14/2026</a:t>
             </a:fld>
             <a:endParaRPr lang="en-US"/>
           </a:p>
@@ -9283,7 +9283,7 @@
           <a:p>
             <a:fld id="{740993C0-9AB3-4209-9AF9-896CEF8BC588}" type="datetimeFigureOut">
               <a:rPr lang="en-US" smtClean="0"/>
-              <a:t>2/5/2025</a:t>
+              <a:t>10/14/2026</a:t>
             </a:fld>
             <a:endParaRPr lang="en-US"/>
           </a:p>
@@ -9719,8 +9719,12 @@
               <a:rPr lang="en-US" dirty="0"/>
             </a:br>
             <a:r>
+              <a:rPr lang="en-US" sz="3200"/>
+              <a:t>Session 5: </a:t>
+            </a:r>
+            <a:r>
               <a:rPr lang="en-US" sz="3200" dirty="0"/>
-              <a:t>Session 4: UML in Text Analysis</a:t>
+              <a:t>UML in Text Analysis</a:t>
             </a:r>
             <a:endParaRPr lang="en-US" dirty="0"/>
           </a:p>
@@ -14638,7 +14642,7 @@
           <a:p>
             <a:r>
               <a:rPr lang="en-US" sz="2400" dirty="0"/>
-              <a:t>K-Nearest Neighbors</a:t>
+              <a:t>t-SNE</a:t>
             </a:r>
           </a:p>
           <a:p>
@@ -17576,24 +17580,6 @@
               <a:rPr lang="en-US" dirty="0"/>
               <a:t>Items can load on multiple constructs</a:t>
             </a:r>
-          </a:p>
-          <a:p>
-            <a:pPr marL="0" indent="0">
-              <a:buNone/>
-            </a:pPr>
-            <a:r>
-              <a:rPr lang="en-US" sz="2000" i="1" dirty="0">
-                <a:solidFill>
-                  <a:schemeClr val="bg1">
-                    <a:lumMod val="50000"/>
-                  </a:schemeClr>
-                </a:solidFill>
-              </a:rPr>
-              <a:t>(barring orthogonal rotation)</a:t>
-            </a:r>
-          </a:p>
-          <a:p>
-            <a:endParaRPr lang="en-US" dirty="0"/>
           </a:p>
         </p:txBody>
       </p:sp>
